--- a/docs/marketing/Boursea-Sunum.pptx
+++ b/docs/marketing/Boursea-Sunum.pptx
@@ -2122,29 +2122,33 @@
           <a:ln/>
         </p:spPr>
       </p:sp>
-      <p:sp>
-        <p:nvSpPr>
-          <p:cNvPr id="5" name="Shape 3"/>
-          <p:cNvSpPr/>
-          <p:nvPr/>
-        </p:nvSpPr>
-        <p:spPr>
-          <a:xfrm rot="16200000">
-            <a:off x="822960" y="1234440"/>
-            <a:ext cx="1005840" cy="868680"/>
-          </a:xfrm>
-          <a:prstGeom prst="chevron">
-            <a:avLst/>
-          </a:prstGeom>
-          <a:solidFill>
-            <a:srgbClr val="3B82F6"/>
-          </a:solidFill>
-          <a:ln/>
-        </p:spPr>
-      </p:sp>
-      <p:sp>
-        <p:nvSpPr>
-          <p:cNvPr id="6" name="Text 4"/>
+      <p:pic>
+        <p:nvPicPr>
+          <p:cNvPr id="5" name="Image 0" descr="/private/tmp/claude-501/-Users-ulasbudak-Desktop-borsa-app/e78c8e07-ac03-4beb-bcc3-115504839e4a/scratchpad/deck/logo_mark_accent.png">    </p:cNvPr>
+          <p:cNvPicPr>
+            <a:picLocks noChangeAspect="1"/>
+          </p:cNvPicPr>
+          <p:nvPr/>
+        </p:nvPicPr>
+        <p:blipFill>
+          <a:blip r:embed="rId1"/>
+          <a:stretch>
+            <a:fillRect/>
+          </a:stretch>
+        </p:blipFill>
+        <p:spPr>
+          <a:xfrm>
+            <a:off x="777240" y="1188720"/>
+            <a:ext cx="960120" cy="960120"/>
+          </a:xfrm>
+          <a:prstGeom prst="rect">
+            <a:avLst/>
+          </a:prstGeom>
+        </p:spPr>
+      </p:pic>
+      <p:sp>
+        <p:nvSpPr>
+          <p:cNvPr id="6" name="Text 3"/>
           <p:cNvSpPr txBox="1"/>
           <p:nvPr/>
         </p:nvSpPr>
@@ -2183,7 +2187,7 @@
       </p:sp>
       <p:sp>
         <p:nvSpPr>
-          <p:cNvPr id="7" name="Text 5"/>
+          <p:cNvPr id="7" name="Text 4"/>
           <p:cNvSpPr txBox="1"/>
           <p:nvPr/>
         </p:nvSpPr>
@@ -2222,7 +2226,7 @@
       </p:sp>
       <p:sp>
         <p:nvSpPr>
-          <p:cNvPr id="8" name="Text 6"/>
+          <p:cNvPr id="8" name="Text 5"/>
           <p:cNvSpPr txBox="1"/>
           <p:nvPr/>
         </p:nvSpPr>
@@ -2264,7 +2268,7 @@
       </p:sp>
       <p:sp>
         <p:nvSpPr>
-          <p:cNvPr id="9" name="Text 7"/>
+          <p:cNvPr id="9" name="Text 6"/>
           <p:cNvSpPr txBox="1"/>
           <p:nvPr/>
         </p:nvSpPr>
@@ -3463,15 +3467,39 @@
           </a:p>
         </p:txBody>
       </p:sp>
-      <p:sp>
-        <p:nvSpPr>
-          <p:cNvPr id="35" name="Text 28"/>
-          <p:cNvSpPr txBox="1"/>
-          <p:nvPr/>
-        </p:nvSpPr>
-        <p:spPr>
-          <a:xfrm>
-            <a:off x="548640" y="6400800"/>
+      <p:pic>
+        <p:nvPicPr>
+          <p:cNvPr id="35" name="Image 5" descr="/private/tmp/claude-501/-Users-ulasbudak-Desktop-borsa-app/e78c8e07-ac03-4beb-bcc3-115504839e4a/scratchpad/deck/logo_mark_accent.png">    </p:cNvPr>
+          <p:cNvPicPr>
+            <a:picLocks noChangeAspect="1"/>
+          </p:cNvPicPr>
+          <p:nvPr/>
+        </p:nvPicPr>
+        <p:blipFill>
+          <a:blip r:embed="rId6"/>
+          <a:stretch>
+            <a:fillRect/>
+          </a:stretch>
+        </p:blipFill>
+        <p:spPr>
+          <a:xfrm>
+            <a:off x="548640" y="6437376"/>
+            <a:ext cx="173736" cy="173736"/>
+          </a:xfrm>
+          <a:prstGeom prst="rect">
+            <a:avLst/>
+          </a:prstGeom>
+        </p:spPr>
+      </p:pic>
+      <p:sp>
+        <p:nvSpPr>
+          <p:cNvPr id="36" name="Text 28"/>
+          <p:cNvSpPr txBox="1"/>
+          <p:nvPr/>
+        </p:nvSpPr>
+        <p:spPr>
+          <a:xfrm>
+            <a:off x="786384" y="6400800"/>
             <a:ext cx="2743200" cy="274320"/>
           </a:xfrm>
           <a:prstGeom prst="rect">
@@ -4452,15 +4480,39 @@
           </a:p>
         </p:txBody>
       </p:sp>
-      <p:sp>
-        <p:nvSpPr>
-          <p:cNvPr id="29" name="Text 22"/>
-          <p:cNvSpPr txBox="1"/>
-          <p:nvPr/>
-        </p:nvSpPr>
-        <p:spPr>
-          <a:xfrm>
-            <a:off x="548640" y="6400800"/>
+      <p:pic>
+        <p:nvPicPr>
+          <p:cNvPr id="29" name="Image 5" descr="/private/tmp/claude-501/-Users-ulasbudak-Desktop-borsa-app/e78c8e07-ac03-4beb-bcc3-115504839e4a/scratchpad/deck/logo_mark_accent.png">    </p:cNvPr>
+          <p:cNvPicPr>
+            <a:picLocks noChangeAspect="1"/>
+          </p:cNvPicPr>
+          <p:nvPr/>
+        </p:nvPicPr>
+        <p:blipFill>
+          <a:blip r:embed="rId6"/>
+          <a:stretch>
+            <a:fillRect/>
+          </a:stretch>
+        </p:blipFill>
+        <p:spPr>
+          <a:xfrm>
+            <a:off x="548640" y="6437376"/>
+            <a:ext cx="173736" cy="173736"/>
+          </a:xfrm>
+          <a:prstGeom prst="rect">
+            <a:avLst/>
+          </a:prstGeom>
+        </p:spPr>
+      </p:pic>
+      <p:sp>
+        <p:nvSpPr>
+          <p:cNvPr id="30" name="Text 22"/>
+          <p:cNvSpPr txBox="1"/>
+          <p:nvPr/>
+        </p:nvSpPr>
+        <p:spPr>
+          <a:xfrm>
+            <a:off x="786384" y="6400800"/>
             <a:ext cx="2743200" cy="274320"/>
           </a:xfrm>
           <a:prstGeom prst="rect">
@@ -5049,15 +5101,39 @@
           </a:p>
         </p:txBody>
       </p:sp>
-      <p:sp>
-        <p:nvSpPr>
-          <p:cNvPr id="15" name="Text 11"/>
-          <p:cNvSpPr txBox="1"/>
-          <p:nvPr/>
-        </p:nvSpPr>
-        <p:spPr>
-          <a:xfrm>
-            <a:off x="548640" y="6400800"/>
+      <p:pic>
+        <p:nvPicPr>
+          <p:cNvPr id="15" name="Image 2" descr="/private/tmp/claude-501/-Users-ulasbudak-Desktop-borsa-app/e78c8e07-ac03-4beb-bcc3-115504839e4a/scratchpad/deck/logo_mark_accent.png">    </p:cNvPr>
+          <p:cNvPicPr>
+            <a:picLocks noChangeAspect="1"/>
+          </p:cNvPicPr>
+          <p:nvPr/>
+        </p:nvPicPr>
+        <p:blipFill>
+          <a:blip r:embed="rId3"/>
+          <a:stretch>
+            <a:fillRect/>
+          </a:stretch>
+        </p:blipFill>
+        <p:spPr>
+          <a:xfrm>
+            <a:off x="548640" y="6437376"/>
+            <a:ext cx="173736" cy="173736"/>
+          </a:xfrm>
+          <a:prstGeom prst="rect">
+            <a:avLst/>
+          </a:prstGeom>
+        </p:spPr>
+      </p:pic>
+      <p:sp>
+        <p:nvSpPr>
+          <p:cNvPr id="16" name="Text 11"/>
+          <p:cNvSpPr txBox="1"/>
+          <p:nvPr/>
+        </p:nvSpPr>
+        <p:spPr>
+          <a:xfrm>
+            <a:off x="786384" y="6400800"/>
             <a:ext cx="2743200" cy="274320"/>
           </a:xfrm>
           <a:prstGeom prst="rect">
@@ -5548,15 +5624,39 @@
           </a:p>
         </p:txBody>
       </p:sp>
-      <p:sp>
-        <p:nvSpPr>
-          <p:cNvPr id="15" name="Text 11"/>
-          <p:cNvSpPr txBox="1"/>
-          <p:nvPr/>
-        </p:nvSpPr>
-        <p:spPr>
-          <a:xfrm>
-            <a:off x="548640" y="6400800"/>
+      <p:pic>
+        <p:nvPicPr>
+          <p:cNvPr id="15" name="Image 2" descr="/private/tmp/claude-501/-Users-ulasbudak-Desktop-borsa-app/e78c8e07-ac03-4beb-bcc3-115504839e4a/scratchpad/deck/logo_mark_accent.png">    </p:cNvPr>
+          <p:cNvPicPr>
+            <a:picLocks noChangeAspect="1"/>
+          </p:cNvPicPr>
+          <p:nvPr/>
+        </p:nvPicPr>
+        <p:blipFill>
+          <a:blip r:embed="rId3"/>
+          <a:stretch>
+            <a:fillRect/>
+          </a:stretch>
+        </p:blipFill>
+        <p:spPr>
+          <a:xfrm>
+            <a:off x="548640" y="6437376"/>
+            <a:ext cx="173736" cy="173736"/>
+          </a:xfrm>
+          <a:prstGeom prst="rect">
+            <a:avLst/>
+          </a:prstGeom>
+        </p:spPr>
+      </p:pic>
+      <p:sp>
+        <p:nvSpPr>
+          <p:cNvPr id="16" name="Text 11"/>
+          <p:cNvSpPr txBox="1"/>
+          <p:nvPr/>
+        </p:nvSpPr>
+        <p:spPr>
+          <a:xfrm>
+            <a:off x="786384" y="6400800"/>
             <a:ext cx="2743200" cy="274320"/>
           </a:xfrm>
           <a:prstGeom prst="rect">
@@ -5634,29 +5734,33 @@
           <a:ln/>
         </p:spPr>
       </p:sp>
-      <p:sp>
-        <p:nvSpPr>
-          <p:cNvPr id="3" name="Shape 1"/>
-          <p:cNvSpPr/>
-          <p:nvPr/>
-        </p:nvSpPr>
-        <p:spPr>
-          <a:xfrm rot="16200000">
-            <a:off x="822960" y="822960"/>
-            <a:ext cx="777240" cy="658368"/>
-          </a:xfrm>
-          <a:prstGeom prst="chevron">
-            <a:avLst/>
-          </a:prstGeom>
-          <a:solidFill>
-            <a:srgbClr val="3B82F6"/>
-          </a:solidFill>
-          <a:ln/>
-        </p:spPr>
-      </p:sp>
-      <p:sp>
-        <p:nvSpPr>
-          <p:cNvPr id="4" name="Text 2"/>
+      <p:pic>
+        <p:nvPicPr>
+          <p:cNvPr id="3" name="Image 0" descr="/private/tmp/claude-501/-Users-ulasbudak-Desktop-borsa-app/e78c8e07-ac03-4beb-bcc3-115504839e4a/scratchpad/deck/logo_mark_accent.png">    </p:cNvPr>
+          <p:cNvPicPr>
+            <a:picLocks noChangeAspect="1"/>
+          </p:cNvPicPr>
+          <p:nvPr/>
+        </p:nvPicPr>
+        <p:blipFill>
+          <a:blip r:embed="rId1"/>
+          <a:stretch>
+            <a:fillRect/>
+          </a:stretch>
+        </p:blipFill>
+        <p:spPr>
+          <a:xfrm>
+            <a:off x="822960" y="777240"/>
+            <a:ext cx="777240" cy="777240"/>
+          </a:xfrm>
+          <a:prstGeom prst="rect">
+            <a:avLst/>
+          </a:prstGeom>
+        </p:spPr>
+      </p:pic>
+      <p:sp>
+        <p:nvSpPr>
+          <p:cNvPr id="4" name="Text 1"/>
           <p:cNvSpPr txBox="1"/>
           <p:nvPr/>
         </p:nvSpPr>
@@ -5695,7 +5799,7 @@
       </p:sp>
       <p:sp>
         <p:nvSpPr>
-          <p:cNvPr id="5" name="Text 3"/>
+          <p:cNvPr id="5" name="Text 2"/>
           <p:cNvSpPr txBox="1"/>
           <p:nvPr/>
         </p:nvSpPr>
@@ -5734,7 +5838,7 @@
       </p:sp>
       <p:sp>
         <p:nvSpPr>
-          <p:cNvPr id="6" name="Shape 4"/>
+          <p:cNvPr id="6" name="Shape 3"/>
           <p:cNvSpPr/>
           <p:nvPr/>
         </p:nvSpPr>
@@ -5768,7 +5872,7 @@
       </p:sp>
       <p:sp>
         <p:nvSpPr>
-          <p:cNvPr id="7" name="Shape 5"/>
+          <p:cNvPr id="7" name="Shape 4"/>
           <p:cNvSpPr/>
           <p:nvPr/>
         </p:nvSpPr>
@@ -5788,14 +5892,14 @@
       </p:sp>
       <p:pic>
         <p:nvPicPr>
-          <p:cNvPr id="8" name="Image 0" descr="/private/tmp/claude-501/-Users-ulasbudak-Desktop-borsa-app/e78c8e07-ac03-4beb-bcc3-115504839e4a/scratchpad/deck/icons/mail-white.png">    </p:cNvPr>
+          <p:cNvPr id="8" name="Image 1" descr="/private/tmp/claude-501/-Users-ulasbudak-Desktop-borsa-app/e78c8e07-ac03-4beb-bcc3-115504839e4a/scratchpad/deck/icons/mail-white.png">    </p:cNvPr>
           <p:cNvPicPr>
             <a:picLocks noChangeAspect="1"/>
           </p:cNvPicPr>
           <p:nvPr/>
         </p:nvPicPr>
         <p:blipFill>
-          <a:blip r:embed="rId1"/>
+          <a:blip r:embed="rId2"/>
           <a:stretch>
             <a:fillRect/>
           </a:stretch>
@@ -5812,7 +5916,7 @@
       </p:pic>
       <p:sp>
         <p:nvSpPr>
-          <p:cNvPr id="9" name="Text 6"/>
+          <p:cNvPr id="9" name="Text 5"/>
           <p:cNvSpPr txBox="1"/>
           <p:nvPr/>
         </p:nvSpPr>
@@ -5851,7 +5955,7 @@
       </p:sp>
       <p:sp>
         <p:nvSpPr>
-          <p:cNvPr id="10" name="Text 7"/>
+          <p:cNvPr id="10" name="Text 6"/>
           <p:cNvSpPr txBox="1"/>
           <p:nvPr/>
         </p:nvSpPr>
@@ -6705,15 +6809,39 @@
           </a:p>
         </p:txBody>
       </p:sp>
-      <p:sp>
-        <p:nvSpPr>
-          <p:cNvPr id="26" name="Text 20"/>
-          <p:cNvSpPr txBox="1"/>
-          <p:nvPr/>
-        </p:nvSpPr>
-        <p:spPr>
-          <a:xfrm>
-            <a:off x="548640" y="6400800"/>
+      <p:pic>
+        <p:nvPicPr>
+          <p:cNvPr id="26" name="Image 4" descr="/private/tmp/claude-501/-Users-ulasbudak-Desktop-borsa-app/e78c8e07-ac03-4beb-bcc3-115504839e4a/scratchpad/deck/logo_mark_accent.png">    </p:cNvPr>
+          <p:cNvPicPr>
+            <a:picLocks noChangeAspect="1"/>
+          </p:cNvPicPr>
+          <p:nvPr/>
+        </p:nvPicPr>
+        <p:blipFill>
+          <a:blip r:embed="rId5"/>
+          <a:stretch>
+            <a:fillRect/>
+          </a:stretch>
+        </p:blipFill>
+        <p:spPr>
+          <a:xfrm>
+            <a:off x="548640" y="6437376"/>
+            <a:ext cx="173736" cy="173736"/>
+          </a:xfrm>
+          <a:prstGeom prst="rect">
+            <a:avLst/>
+          </a:prstGeom>
+        </p:spPr>
+      </p:pic>
+      <p:sp>
+        <p:nvSpPr>
+          <p:cNvPr id="27" name="Text 20"/>
+          <p:cNvSpPr txBox="1"/>
+          <p:nvPr/>
+        </p:nvSpPr>
+        <p:spPr>
+          <a:xfrm>
+            <a:off x="786384" y="6400800"/>
             <a:ext cx="2743200" cy="274320"/>
           </a:xfrm>
           <a:prstGeom prst="rect">
@@ -7439,15 +7567,39 @@
           </a:p>
         </p:txBody>
       </p:sp>
-      <p:sp>
-        <p:nvSpPr>
-          <p:cNvPr id="22" name="Text 17"/>
-          <p:cNvSpPr txBox="1"/>
-          <p:nvPr/>
-        </p:nvSpPr>
-        <p:spPr>
-          <a:xfrm>
-            <a:off x="548640" y="6400800"/>
+      <p:pic>
+        <p:nvPicPr>
+          <p:cNvPr id="22" name="Image 3" descr="/private/tmp/claude-501/-Users-ulasbudak-Desktop-borsa-app/e78c8e07-ac03-4beb-bcc3-115504839e4a/scratchpad/deck/logo_mark_accent.png">    </p:cNvPr>
+          <p:cNvPicPr>
+            <a:picLocks noChangeAspect="1"/>
+          </p:cNvPicPr>
+          <p:nvPr/>
+        </p:nvPicPr>
+        <p:blipFill>
+          <a:blip r:embed="rId4"/>
+          <a:stretch>
+            <a:fillRect/>
+          </a:stretch>
+        </p:blipFill>
+        <p:spPr>
+          <a:xfrm>
+            <a:off x="548640" y="6437376"/>
+            <a:ext cx="173736" cy="173736"/>
+          </a:xfrm>
+          <a:prstGeom prst="rect">
+            <a:avLst/>
+          </a:prstGeom>
+        </p:spPr>
+      </p:pic>
+      <p:sp>
+        <p:nvSpPr>
+          <p:cNvPr id="23" name="Text 17"/>
+          <p:cNvSpPr txBox="1"/>
+          <p:nvPr/>
+        </p:nvSpPr>
+        <p:spPr>
+          <a:xfrm>
+            <a:off x="786384" y="6400800"/>
             <a:ext cx="2743200" cy="274320"/>
           </a:xfrm>
           <a:prstGeom prst="rect">
@@ -8916,15 +9068,39 @@
           </a:p>
         </p:txBody>
       </p:sp>
-      <p:sp>
-        <p:nvSpPr>
-          <p:cNvPr id="45" name="Text 35"/>
-          <p:cNvSpPr txBox="1"/>
-          <p:nvPr/>
-        </p:nvSpPr>
-        <p:spPr>
-          <a:xfrm>
-            <a:off x="548640" y="6400800"/>
+      <p:pic>
+        <p:nvPicPr>
+          <p:cNvPr id="45" name="Image 8" descr="/private/tmp/claude-501/-Users-ulasbudak-Desktop-borsa-app/e78c8e07-ac03-4beb-bcc3-115504839e4a/scratchpad/deck/logo_mark_accent.png">    </p:cNvPr>
+          <p:cNvPicPr>
+            <a:picLocks noChangeAspect="1"/>
+          </p:cNvPicPr>
+          <p:nvPr/>
+        </p:nvPicPr>
+        <p:blipFill>
+          <a:blip r:embed="rId9"/>
+          <a:stretch>
+            <a:fillRect/>
+          </a:stretch>
+        </p:blipFill>
+        <p:spPr>
+          <a:xfrm>
+            <a:off x="548640" y="6437376"/>
+            <a:ext cx="173736" cy="173736"/>
+          </a:xfrm>
+          <a:prstGeom prst="rect">
+            <a:avLst/>
+          </a:prstGeom>
+        </p:spPr>
+      </p:pic>
+      <p:sp>
+        <p:nvSpPr>
+          <p:cNvPr id="46" name="Text 35"/>
+          <p:cNvSpPr txBox="1"/>
+          <p:nvPr/>
+        </p:nvSpPr>
+        <p:spPr>
+          <a:xfrm>
+            <a:off x="786384" y="6400800"/>
             <a:ext cx="2743200" cy="274320"/>
           </a:xfrm>
           <a:prstGeom prst="rect">
@@ -9829,15 +10005,39 @@
           </a:p>
         </p:txBody>
       </p:sp>
-      <p:sp>
-        <p:nvSpPr>
-          <p:cNvPr id="27" name="Text 22"/>
-          <p:cNvSpPr txBox="1"/>
-          <p:nvPr/>
-        </p:nvSpPr>
-        <p:spPr>
-          <a:xfrm>
-            <a:off x="548640" y="6400800"/>
+      <p:pic>
+        <p:nvPicPr>
+          <p:cNvPr id="27" name="Image 3" descr="/private/tmp/claude-501/-Users-ulasbudak-Desktop-borsa-app/e78c8e07-ac03-4beb-bcc3-115504839e4a/scratchpad/deck/logo_mark_accent.png">    </p:cNvPr>
+          <p:cNvPicPr>
+            <a:picLocks noChangeAspect="1"/>
+          </p:cNvPicPr>
+          <p:nvPr/>
+        </p:nvPicPr>
+        <p:blipFill>
+          <a:blip r:embed="rId4"/>
+          <a:stretch>
+            <a:fillRect/>
+          </a:stretch>
+        </p:blipFill>
+        <p:spPr>
+          <a:xfrm>
+            <a:off x="548640" y="6437376"/>
+            <a:ext cx="173736" cy="173736"/>
+          </a:xfrm>
+          <a:prstGeom prst="rect">
+            <a:avLst/>
+          </a:prstGeom>
+        </p:spPr>
+      </p:pic>
+      <p:sp>
+        <p:nvSpPr>
+          <p:cNvPr id="28" name="Text 22"/>
+          <p:cNvSpPr txBox="1"/>
+          <p:nvPr/>
+        </p:nvSpPr>
+        <p:spPr>
+          <a:xfrm>
+            <a:off x="786384" y="6400800"/>
             <a:ext cx="2743200" cy="274320"/>
           </a:xfrm>
           <a:prstGeom prst="rect">
@@ -12042,15 +12242,39 @@
           </a:p>
         </p:txBody>
       </p:sp>
-      <p:sp>
-        <p:nvSpPr>
-          <p:cNvPr id="68" name="Text 66"/>
-          <p:cNvSpPr txBox="1"/>
-          <p:nvPr/>
-        </p:nvSpPr>
-        <p:spPr>
-          <a:xfrm>
-            <a:off x="548640" y="6400800"/>
+      <p:pic>
+        <p:nvPicPr>
+          <p:cNvPr id="68" name="Image 0" descr="/private/tmp/claude-501/-Users-ulasbudak-Desktop-borsa-app/e78c8e07-ac03-4beb-bcc3-115504839e4a/scratchpad/deck/logo_mark_accent.png">    </p:cNvPr>
+          <p:cNvPicPr>
+            <a:picLocks noChangeAspect="1"/>
+          </p:cNvPicPr>
+          <p:nvPr/>
+        </p:nvPicPr>
+        <p:blipFill>
+          <a:blip r:embed="rId1"/>
+          <a:stretch>
+            <a:fillRect/>
+          </a:stretch>
+        </p:blipFill>
+        <p:spPr>
+          <a:xfrm>
+            <a:off x="548640" y="6437376"/>
+            <a:ext cx="173736" cy="173736"/>
+          </a:xfrm>
+          <a:prstGeom prst="rect">
+            <a:avLst/>
+          </a:prstGeom>
+        </p:spPr>
+      </p:pic>
+      <p:sp>
+        <p:nvSpPr>
+          <p:cNvPr id="69" name="Text 66"/>
+          <p:cNvSpPr txBox="1"/>
+          <p:nvPr/>
+        </p:nvSpPr>
+        <p:spPr>
+          <a:xfrm>
+            <a:off x="786384" y="6400800"/>
             <a:ext cx="2743200" cy="274320"/>
           </a:xfrm>
           <a:prstGeom prst="rect">
@@ -13021,15 +13245,39 @@
           </a:p>
         </p:txBody>
       </p:sp>
-      <p:sp>
-        <p:nvSpPr>
-          <p:cNvPr id="27" name="Text 23"/>
-          <p:cNvSpPr txBox="1"/>
-          <p:nvPr/>
-        </p:nvSpPr>
-        <p:spPr>
-          <a:xfrm>
-            <a:off x="548640" y="6400800"/>
+      <p:pic>
+        <p:nvPicPr>
+          <p:cNvPr id="27" name="Image 2" descr="/private/tmp/claude-501/-Users-ulasbudak-Desktop-borsa-app/e78c8e07-ac03-4beb-bcc3-115504839e4a/scratchpad/deck/logo_mark_accent.png">    </p:cNvPr>
+          <p:cNvPicPr>
+            <a:picLocks noChangeAspect="1"/>
+          </p:cNvPicPr>
+          <p:nvPr/>
+        </p:nvPicPr>
+        <p:blipFill>
+          <a:blip r:embed="rId3"/>
+          <a:stretch>
+            <a:fillRect/>
+          </a:stretch>
+        </p:blipFill>
+        <p:spPr>
+          <a:xfrm>
+            <a:off x="548640" y="6437376"/>
+            <a:ext cx="173736" cy="173736"/>
+          </a:xfrm>
+          <a:prstGeom prst="rect">
+            <a:avLst/>
+          </a:prstGeom>
+        </p:spPr>
+      </p:pic>
+      <p:sp>
+        <p:nvSpPr>
+          <p:cNvPr id="28" name="Text 23"/>
+          <p:cNvSpPr txBox="1"/>
+          <p:nvPr/>
+        </p:nvSpPr>
+        <p:spPr>
+          <a:xfrm>
+            <a:off x="786384" y="6400800"/>
             <a:ext cx="2743200" cy="274320"/>
           </a:xfrm>
           <a:prstGeom prst="rect">
@@ -14420,15 +14668,39 @@
           </a:p>
         </p:txBody>
       </p:sp>
-      <p:sp>
-        <p:nvSpPr>
-          <p:cNvPr id="47" name="Text 33"/>
-          <p:cNvSpPr txBox="1"/>
-          <p:nvPr/>
-        </p:nvSpPr>
-        <p:spPr>
-          <a:xfrm>
-            <a:off x="548640" y="6400800"/>
+      <p:pic>
+        <p:nvPicPr>
+          <p:cNvPr id="47" name="Image 12" descr="/private/tmp/claude-501/-Users-ulasbudak-Desktop-borsa-app/e78c8e07-ac03-4beb-bcc3-115504839e4a/scratchpad/deck/logo_mark_accent.png">    </p:cNvPr>
+          <p:cNvPicPr>
+            <a:picLocks noChangeAspect="1"/>
+          </p:cNvPicPr>
+          <p:nvPr/>
+        </p:nvPicPr>
+        <p:blipFill>
+          <a:blip r:embed="rId13"/>
+          <a:stretch>
+            <a:fillRect/>
+          </a:stretch>
+        </p:blipFill>
+        <p:spPr>
+          <a:xfrm>
+            <a:off x="548640" y="6437376"/>
+            <a:ext cx="173736" cy="173736"/>
+          </a:xfrm>
+          <a:prstGeom prst="rect">
+            <a:avLst/>
+          </a:prstGeom>
+        </p:spPr>
+      </p:pic>
+      <p:sp>
+        <p:nvSpPr>
+          <p:cNvPr id="48" name="Text 33"/>
+          <p:cNvSpPr txBox="1"/>
+          <p:nvPr/>
+        </p:nvSpPr>
+        <p:spPr>
+          <a:xfrm>
+            <a:off x="786384" y="6400800"/>
             <a:ext cx="2743200" cy="274320"/>
           </a:xfrm>
           <a:prstGeom prst="rect">
@@ -16062,15 +16334,39 @@
           </a:p>
         </p:txBody>
       </p:sp>
-      <p:sp>
-        <p:nvSpPr>
-          <p:cNvPr id="43" name="Text 38"/>
-          <p:cNvSpPr txBox="1"/>
-          <p:nvPr/>
-        </p:nvSpPr>
-        <p:spPr>
-          <a:xfrm>
-            <a:off x="548640" y="6400800"/>
+      <p:pic>
+        <p:nvPicPr>
+          <p:cNvPr id="43" name="Image 3" descr="/private/tmp/claude-501/-Users-ulasbudak-Desktop-borsa-app/e78c8e07-ac03-4beb-bcc3-115504839e4a/scratchpad/deck/logo_mark_accent.png">    </p:cNvPr>
+          <p:cNvPicPr>
+            <a:picLocks noChangeAspect="1"/>
+          </p:cNvPicPr>
+          <p:nvPr/>
+        </p:nvPicPr>
+        <p:blipFill>
+          <a:blip r:embed="rId4"/>
+          <a:stretch>
+            <a:fillRect/>
+          </a:stretch>
+        </p:blipFill>
+        <p:spPr>
+          <a:xfrm>
+            <a:off x="548640" y="6437376"/>
+            <a:ext cx="173736" cy="173736"/>
+          </a:xfrm>
+          <a:prstGeom prst="rect">
+            <a:avLst/>
+          </a:prstGeom>
+        </p:spPr>
+      </p:pic>
+      <p:sp>
+        <p:nvSpPr>
+          <p:cNvPr id="44" name="Text 38"/>
+          <p:cNvSpPr txBox="1"/>
+          <p:nvPr/>
+        </p:nvSpPr>
+        <p:spPr>
+          <a:xfrm>
+            <a:off x="786384" y="6400800"/>
             <a:ext cx="2743200" cy="274320"/>
           </a:xfrm>
           <a:prstGeom prst="rect">
